--- a/spirithaus/packaging/dist/spirithaus-box-label-artwork-A4.pptx
+++ b/spirithaus/packaging/dist/spirithaus-box-label-artwork-A4.pptx
@@ -2791,7 +2791,7 @@
         <p:spPr>
           <a:xfrm>
             <a:off x="4320000" y="9522000"/>
-            <a:ext cx="1152000" cy="144000"/>
+            <a:ext cx="2736000" cy="144000"/>
           </a:xfrm>
           <a:prstGeom prst="rect">
             <a:avLst/>
@@ -2807,7 +2807,7 @@
               <a:buNone/>
             </a:pPr>
             <a:r>
-              <a:rPr lang="en-US" sz="650" spc="80" kern="0" dirty="0">
+              <a:rPr lang="en-US" sz="600" spc="110" kern="0" dirty="0">
                 <a:solidFill>
                   <a:srgbClr val="B7B5B1"/>
                 </a:solidFill>
@@ -2815,7 +2815,85 @@
                 <a:ea typeface="Space Mono" pitchFamily="34" charset="-122"/>
                 <a:cs typeface="Space Mono" pitchFamily="34" charset="-120"/>
               </a:rPr>
-              <a:t>LICENCE No.</a:t>
+              <a:t>PACKAGED LIQUOR LICENCE (NSW)</a:t>
+            </a:r>
+            <a:endParaRPr lang="en-US" sz="600" dirty="0"/>
+          </a:p>
+        </p:txBody>
+      </p:sp>
+      <p:sp>
+        <p:nvSpPr>
+          <p:cNvPr id="55" name="Text 47"/>
+          <p:cNvSpPr txBox="1"/>
+          <p:nvPr/>
+        </p:nvSpPr>
+        <p:spPr>
+          <a:xfrm>
+            <a:off x="4320000" y="9662400"/>
+            <a:ext cx="2736000" cy="180000"/>
+          </a:xfrm>
+          <a:prstGeom prst="rect">
+            <a:avLst/>
+          </a:prstGeom>
+          <a:noFill/>
+          <a:ln/>
+        </p:spPr>
+        <p:txBody>
+          <a:bodyPr wrap="square" lIns="0" tIns="0" rIns="0" bIns="0" rtlCol="0" anchor="ctr"/>
+          <a:lstStyle/>
+          <a:p>
+            <a:pPr algn="r" indent="0" marL="0">
+              <a:buNone/>
+            </a:pPr>
+            <a:r>
+              <a:rPr lang="en-US" sz="910" b="1" spc="90" kern="0" dirty="0">
+                <a:solidFill>
+                  <a:srgbClr val="F2EFE9"/>
+                </a:solidFill>
+                <a:latin typeface="Space Mono" pitchFamily="34" charset="0"/>
+                <a:ea typeface="Space Mono" pitchFamily="34" charset="-122"/>
+                <a:cs typeface="Space Mono" pitchFamily="34" charset="-120"/>
+              </a:rPr>
+              <a:t>LIQP700301260</a:t>
+            </a:r>
+            <a:endParaRPr lang="en-US" sz="910" dirty="0"/>
+          </a:p>
+        </p:txBody>
+      </p:sp>
+      <p:sp>
+        <p:nvSpPr>
+          <p:cNvPr id="56" name="Text 48"/>
+          <p:cNvSpPr txBox="1"/>
+          <p:nvPr/>
+        </p:nvSpPr>
+        <p:spPr>
+          <a:xfrm>
+            <a:off x="4320000" y="9972000"/>
+            <a:ext cx="1152000" cy="144000"/>
+          </a:xfrm>
+          <a:prstGeom prst="rect">
+            <a:avLst/>
+          </a:prstGeom>
+          <a:noFill/>
+          <a:ln/>
+        </p:spPr>
+        <p:txBody>
+          <a:bodyPr wrap="square" lIns="0" tIns="0" rIns="0" bIns="0" rtlCol="0" anchor="ctr"/>
+          <a:lstStyle/>
+          <a:p>
+            <a:pPr algn="r" indent="0" marL="0">
+              <a:buNone/>
+            </a:pPr>
+            <a:r>
+              <a:rPr lang="en-US" sz="650" spc="80" kern="0" dirty="0">
+                <a:solidFill>
+                  <a:srgbClr val="B7B5B1"/>
+                </a:solidFill>
+                <a:latin typeface="Space Mono" pitchFamily="34" charset="0"/>
+                <a:ea typeface="Space Mono" pitchFamily="34" charset="-122"/>
+                <a:cs typeface="Space Mono" pitchFamily="34" charset="-120"/>
+              </a:rPr>
+              <a:t>ABN</a:t>
             </a:r>
             <a:endParaRPr lang="en-US" sz="650" dirty="0"/>
           </a:p>
@@ -2823,13 +2901,13 @@
       </p:sp>
       <p:sp>
         <p:nvSpPr>
-          <p:cNvPr id="55" name="Shape 47"/>
+          <p:cNvPr id="57" name="Shape 49"/>
           <p:cNvSpPr/>
           <p:nvPr/>
         </p:nvSpPr>
         <p:spPr>
           <a:xfrm>
-            <a:off x="5580000" y="9651600"/>
+            <a:off x="5580000" y="10101600"/>
             <a:ext cx="1476000" cy="0"/>
           </a:xfrm>
           <a:prstGeom prst="line">
@@ -2846,13 +2924,13 @@
       </p:sp>
       <p:sp>
         <p:nvSpPr>
-          <p:cNvPr id="56" name="Text 48"/>
-          <p:cNvSpPr txBox="1"/>
-          <p:nvPr/>
-        </p:nvSpPr>
-        <p:spPr>
-          <a:xfrm>
-            <a:off x="4320000" y="9745200"/>
+          <p:cNvPr id="58" name="Text 50"/>
+          <p:cNvSpPr txBox="1"/>
+          <p:nvPr/>
+        </p:nvSpPr>
+        <p:spPr>
+          <a:xfrm>
+            <a:off x="4320000" y="10195200"/>
             <a:ext cx="1152000" cy="144000"/>
           </a:xfrm>
           <a:prstGeom prst="rect">
@@ -2877,68 +2955,6 @@
                 <a:ea typeface="Space Mono" pitchFamily="34" charset="-122"/>
                 <a:cs typeface="Space Mono" pitchFamily="34" charset="-120"/>
               </a:rPr>
-              <a:t>ABN</a:t>
-            </a:r>
-            <a:endParaRPr lang="en-US" sz="650" dirty="0"/>
-          </a:p>
-        </p:txBody>
-      </p:sp>
-      <p:sp>
-        <p:nvSpPr>
-          <p:cNvPr id="57" name="Shape 49"/>
-          <p:cNvSpPr/>
-          <p:nvPr/>
-        </p:nvSpPr>
-        <p:spPr>
-          <a:xfrm>
-            <a:off x="5580000" y="9874800"/>
-            <a:ext cx="1476000" cy="0"/>
-          </a:xfrm>
-          <a:prstGeom prst="line">
-            <a:avLst/>
-          </a:prstGeom>
-          <a:noFill/>
-          <a:ln w="11430">
-            <a:solidFill>
-              <a:srgbClr val="767572"/>
-            </a:solidFill>
-            <a:prstDash val="solid"/>
-          </a:ln>
-        </p:spPr>
-      </p:sp>
-      <p:sp>
-        <p:nvSpPr>
-          <p:cNvPr id="58" name="Text 50"/>
-          <p:cNvSpPr txBox="1"/>
-          <p:nvPr/>
-        </p:nvSpPr>
-        <p:spPr>
-          <a:xfrm>
-            <a:off x="4320000" y="9968400"/>
-            <a:ext cx="1152000" cy="144000"/>
-          </a:xfrm>
-          <a:prstGeom prst="rect">
-            <a:avLst/>
-          </a:prstGeom>
-          <a:noFill/>
-          <a:ln/>
-        </p:spPr>
-        <p:txBody>
-          <a:bodyPr wrap="square" lIns="0" tIns="0" rIns="0" bIns="0" rtlCol="0" anchor="ctr"/>
-          <a:lstStyle/>
-          <a:p>
-            <a:pPr algn="r" indent="0" marL="0">
-              <a:buNone/>
-            </a:pPr>
-            <a:r>
-              <a:rPr lang="en-US" sz="650" spc="80" kern="0" dirty="0">
-                <a:solidFill>
-                  <a:srgbClr val="B7B5B1"/>
-                </a:solidFill>
-                <a:latin typeface="Space Mono" pitchFamily="34" charset="0"/>
-                <a:ea typeface="Space Mono" pitchFamily="34" charset="-122"/>
-                <a:cs typeface="Space Mono" pitchFamily="34" charset="-120"/>
-              </a:rPr>
               <a:t>CONSIGNMENT</a:t>
             </a:r>
             <a:endParaRPr lang="en-US" sz="650" dirty="0"/>
@@ -2953,7 +2969,7 @@
         </p:nvSpPr>
         <p:spPr>
           <a:xfrm>
-            <a:off x="5580000" y="10098000"/>
+            <a:off x="5580000" y="10324800"/>
             <a:ext cx="1476000" cy="0"/>
           </a:xfrm>
           <a:prstGeom prst="line">
@@ -4639,7 +4655,7 @@
         <p:spPr>
           <a:xfrm>
             <a:off x="4320000" y="9522000"/>
-            <a:ext cx="1152000" cy="144000"/>
+            <a:ext cx="2736000" cy="144000"/>
           </a:xfrm>
           <a:prstGeom prst="rect">
             <a:avLst/>
@@ -4655,7 +4671,7 @@
               <a:buNone/>
             </a:pPr>
             <a:r>
-              <a:rPr lang="en-US" sz="650" spc="80" kern="0" dirty="0">
+              <a:rPr lang="en-US" sz="600" spc="110" kern="0" dirty="0">
                 <a:solidFill>
                   <a:srgbClr val="4C4B48"/>
                 </a:solidFill>
@@ -4663,7 +4679,85 @@
                 <a:ea typeface="Space Mono" pitchFamily="34" charset="-122"/>
                 <a:cs typeface="Space Mono" pitchFamily="34" charset="-120"/>
               </a:rPr>
-              <a:t>LICENCE No.</a:t>
+              <a:t>PACKAGED LIQUOR LICENCE (NSW)</a:t>
+            </a:r>
+            <a:endParaRPr lang="en-US" sz="600" dirty="0"/>
+          </a:p>
+        </p:txBody>
+      </p:sp>
+      <p:sp>
+        <p:nvSpPr>
+          <p:cNvPr id="55" name="Text 47"/>
+          <p:cNvSpPr txBox="1"/>
+          <p:nvPr/>
+        </p:nvSpPr>
+        <p:spPr>
+          <a:xfrm>
+            <a:off x="4320000" y="9662400"/>
+            <a:ext cx="2736000" cy="180000"/>
+          </a:xfrm>
+          <a:prstGeom prst="rect">
+            <a:avLst/>
+          </a:prstGeom>
+          <a:noFill/>
+          <a:ln/>
+        </p:spPr>
+        <p:txBody>
+          <a:bodyPr wrap="square" lIns="0" tIns="0" rIns="0" bIns="0" rtlCol="0" anchor="ctr"/>
+          <a:lstStyle/>
+          <a:p>
+            <a:pPr algn="r" indent="0" marL="0">
+              <a:buNone/>
+            </a:pPr>
+            <a:r>
+              <a:rPr lang="en-US" sz="910" b="1" spc="90" kern="0" dirty="0">
+                <a:solidFill>
+                  <a:srgbClr val="111110"/>
+                </a:solidFill>
+                <a:latin typeface="Space Mono" pitchFamily="34" charset="0"/>
+                <a:ea typeface="Space Mono" pitchFamily="34" charset="-122"/>
+                <a:cs typeface="Space Mono" pitchFamily="34" charset="-120"/>
+              </a:rPr>
+              <a:t>LIQP700301260</a:t>
+            </a:r>
+            <a:endParaRPr lang="en-US" sz="910" dirty="0"/>
+          </a:p>
+        </p:txBody>
+      </p:sp>
+      <p:sp>
+        <p:nvSpPr>
+          <p:cNvPr id="56" name="Text 48"/>
+          <p:cNvSpPr txBox="1"/>
+          <p:nvPr/>
+        </p:nvSpPr>
+        <p:spPr>
+          <a:xfrm>
+            <a:off x="4320000" y="9972000"/>
+            <a:ext cx="1152000" cy="144000"/>
+          </a:xfrm>
+          <a:prstGeom prst="rect">
+            <a:avLst/>
+          </a:prstGeom>
+          <a:noFill/>
+          <a:ln/>
+        </p:spPr>
+        <p:txBody>
+          <a:bodyPr wrap="square" lIns="0" tIns="0" rIns="0" bIns="0" rtlCol="0" anchor="ctr"/>
+          <a:lstStyle/>
+          <a:p>
+            <a:pPr algn="r" indent="0" marL="0">
+              <a:buNone/>
+            </a:pPr>
+            <a:r>
+              <a:rPr lang="en-US" sz="650" spc="80" kern="0" dirty="0">
+                <a:solidFill>
+                  <a:srgbClr val="4C4B48"/>
+                </a:solidFill>
+                <a:latin typeface="Space Mono" pitchFamily="34" charset="0"/>
+                <a:ea typeface="Space Mono" pitchFamily="34" charset="-122"/>
+                <a:cs typeface="Space Mono" pitchFamily="34" charset="-120"/>
+              </a:rPr>
+              <a:t>ABN</a:t>
             </a:r>
             <a:endParaRPr lang="en-US" sz="650" dirty="0"/>
           </a:p>
@@ -4671,13 +4765,13 @@
       </p:sp>
       <p:sp>
         <p:nvSpPr>
-          <p:cNvPr id="55" name="Shape 47"/>
+          <p:cNvPr id="57" name="Shape 49"/>
           <p:cNvSpPr/>
           <p:nvPr/>
         </p:nvSpPr>
         <p:spPr>
           <a:xfrm>
-            <a:off x="5580000" y="9651600"/>
+            <a:off x="5580000" y="10101600"/>
             <a:ext cx="1476000" cy="0"/>
           </a:xfrm>
           <a:prstGeom prst="line">
@@ -4694,13 +4788,13 @@
       </p:sp>
       <p:sp>
         <p:nvSpPr>
-          <p:cNvPr id="56" name="Text 48"/>
-          <p:cNvSpPr txBox="1"/>
-          <p:nvPr/>
-        </p:nvSpPr>
-        <p:spPr>
-          <a:xfrm>
-            <a:off x="4320000" y="9745200"/>
+          <p:cNvPr id="58" name="Text 50"/>
+          <p:cNvSpPr txBox="1"/>
+          <p:nvPr/>
+        </p:nvSpPr>
+        <p:spPr>
+          <a:xfrm>
+            <a:off x="4320000" y="10195200"/>
             <a:ext cx="1152000" cy="144000"/>
           </a:xfrm>
           <a:prstGeom prst="rect">
@@ -4725,68 +4819,6 @@
                 <a:ea typeface="Space Mono" pitchFamily="34" charset="-122"/>
                 <a:cs typeface="Space Mono" pitchFamily="34" charset="-120"/>
               </a:rPr>
-              <a:t>ABN</a:t>
-            </a:r>
-            <a:endParaRPr lang="en-US" sz="650" dirty="0"/>
-          </a:p>
-        </p:txBody>
-      </p:sp>
-      <p:sp>
-        <p:nvSpPr>
-          <p:cNvPr id="57" name="Shape 49"/>
-          <p:cNvSpPr/>
-          <p:nvPr/>
-        </p:nvSpPr>
-        <p:spPr>
-          <a:xfrm>
-            <a:off x="5580000" y="9874800"/>
-            <a:ext cx="1476000" cy="0"/>
-          </a:xfrm>
-          <a:prstGeom prst="line">
-            <a:avLst/>
-          </a:prstGeom>
-          <a:noFill/>
-          <a:ln w="11430">
-            <a:solidFill>
-              <a:srgbClr val="8D8B87"/>
-            </a:solidFill>
-            <a:prstDash val="solid"/>
-          </a:ln>
-        </p:spPr>
-      </p:sp>
-      <p:sp>
-        <p:nvSpPr>
-          <p:cNvPr id="58" name="Text 50"/>
-          <p:cNvSpPr txBox="1"/>
-          <p:nvPr/>
-        </p:nvSpPr>
-        <p:spPr>
-          <a:xfrm>
-            <a:off x="4320000" y="9968400"/>
-            <a:ext cx="1152000" cy="144000"/>
-          </a:xfrm>
-          <a:prstGeom prst="rect">
-            <a:avLst/>
-          </a:prstGeom>
-          <a:noFill/>
-          <a:ln/>
-        </p:spPr>
-        <p:txBody>
-          <a:bodyPr wrap="square" lIns="0" tIns="0" rIns="0" bIns="0" rtlCol="0" anchor="ctr"/>
-          <a:lstStyle/>
-          <a:p>
-            <a:pPr algn="r" indent="0" marL="0">
-              <a:buNone/>
-            </a:pPr>
-            <a:r>
-              <a:rPr lang="en-US" sz="650" spc="80" kern="0" dirty="0">
-                <a:solidFill>
-                  <a:srgbClr val="4C4B48"/>
-                </a:solidFill>
-                <a:latin typeface="Space Mono" pitchFamily="34" charset="0"/>
-                <a:ea typeface="Space Mono" pitchFamily="34" charset="-122"/>
-                <a:cs typeface="Space Mono" pitchFamily="34" charset="-120"/>
-              </a:rPr>
               <a:t>CONSIGNMENT</a:t>
             </a:r>
             <a:endParaRPr lang="en-US" sz="650" dirty="0"/>
@@ -4801,7 +4833,7 @@
         </p:nvSpPr>
         <p:spPr>
           <a:xfrm>
-            <a:off x="5580000" y="10098000"/>
+            <a:off x="5580000" y="10324800"/>
             <a:ext cx="1476000" cy="0"/>
           </a:xfrm>
           <a:prstGeom prst="line">

--- a/spirithaus/packaging/dist/spirithaus-box-label-artwork-A4.pptx
+++ b/spirithaus/packaging/dist/spirithaus-box-label-artwork-A4.pptx
@@ -2624,7 +2624,7 @@
                 <a:ea typeface="Space Mono" pitchFamily="34" charset="-122"/>
                 <a:cs typeface="Space Mono" pitchFamily="34" charset="-120"/>
               </a:rPr>
-              <a:t>[PHONE]  ·  [EMAIL]</a:t>
+              <a:t>0452 480 487  ·  sales@spirithaus.com.au</a:t>
             </a:r>
             <a:endParaRPr lang="en-US" sz="710" dirty="0"/>
           </a:p>
@@ -4488,7 +4488,7 @@
                 <a:ea typeface="Space Mono" pitchFamily="34" charset="-122"/>
                 <a:cs typeface="Space Mono" pitchFamily="34" charset="-120"/>
               </a:rPr>
-              <a:t>[PHONE]  ·  [EMAIL]</a:t>
+              <a:t>0452 480 487  ·  sales@spirithaus.com.au</a:t>
             </a:r>
             <a:endParaRPr lang="en-US" sz="710" dirty="0"/>
           </a:p>

--- a/spirithaus/packaging/dist/spirithaus-box-label-artwork-A4.pptx
+++ b/spirithaus/packaging/dist/spirithaus-box-label-artwork-A4.pptx
@@ -507,7 +507,7 @@
               <a:rPr lang="en-US" dirty="0"/>
               <a:t>SPIRITHAUS A4 box label — bone variant. 210 x 297mm.
 Every band, rule and line of copy is editable. The wordmark, handling icons and U
-mark are placed images. Replace [STREET ADDRESS] / [POSTCODE] / [PHONE] / [EMAIL],
+mark are placed images. Confirm the return-address block,
 and confirm the Liquor Act wording with your licensing advisor before printing.</a:t>
             </a:r>
             <a:endParaRPr lang="en-US" dirty="0"/>
@@ -598,7 +598,7 @@
               <a:rPr lang="en-US" dirty="0"/>
               <a:t>SPIRITHAUS A4 box label — ink variant. 210 x 297mm.
 Every band, rule and line of copy is editable. The wordmark, handling icons and U
-mark are placed images. Replace [STREET ADDRESS] / [POSTCODE] / [PHONE] / [EMAIL],
+mark are placed images. Confirm the return-address block,
 and confirm the Liquor Act wording with your licensing advisor before printing.</a:t>
             </a:r>
             <a:endParaRPr lang="en-US" dirty="0"/>
@@ -1193,8 +1193,8 @@
         </p:blipFill>
         <p:spPr>
           <a:xfrm>
-            <a:off x="504000" y="576000"/>
-            <a:ext cx="3560400" cy="360000"/>
+            <a:off x="504000" y="518400"/>
+            <a:ext cx="4294800" cy="435600"/>
           </a:xfrm>
           <a:prstGeom prst="rect">
             <a:avLst/>
@@ -1209,8 +1209,8 @@
         </p:nvSpPr>
         <p:spPr>
           <a:xfrm>
-            <a:off x="504000" y="1044000"/>
-            <a:ext cx="3960000" cy="180000"/>
+            <a:off x="504000" y="1062000"/>
+            <a:ext cx="4320000" cy="180000"/>
           </a:xfrm>
           <a:prstGeom prst="rect">
             <a:avLst/>
@@ -2584,27 +2584,7 @@
                 <a:ea typeface="Space Mono" pitchFamily="34" charset="-122"/>
                 <a:cs typeface="Space Mono" pitchFamily="34" charset="-120"/>
               </a:rPr>
-              <a:t>[STREET ADDRESS]</a:t>
-            </a:r>
-            <a:endParaRPr lang="en-US" sz="710" dirty="0"/>
-          </a:p>
-          <a:p>
-            <a:pPr indent="0" marL="0">
-              <a:lnSpc>
-                <a:spcPct val="155000"/>
-              </a:lnSpc>
-              <a:buNone/>
-            </a:pPr>
-            <a:r>
-              <a:rPr lang="en-US" sz="710" spc="70" kern="0" dirty="0">
-                <a:solidFill>
-                  <a:srgbClr val="7D7C78"/>
-                </a:solidFill>
-                <a:latin typeface="Space Mono" pitchFamily="34" charset="0"/>
-                <a:ea typeface="Space Mono" pitchFamily="34" charset="-122"/>
-                <a:cs typeface="Space Mono" pitchFamily="34" charset="-120"/>
-              </a:rPr>
-              <a:t>SYDNEY NSW [POSTCODE] AUSTRALIA</a:t>
+              <a:t>SYDNEY NSW AUSTRALIA</a:t>
             </a:r>
             <a:endParaRPr lang="en-US" sz="710" dirty="0"/>
           </a:p>
@@ -3057,8 +3037,8 @@
         </p:blipFill>
         <p:spPr>
           <a:xfrm>
-            <a:off x="504000" y="576000"/>
-            <a:ext cx="3560400" cy="360000"/>
+            <a:off x="504000" y="518400"/>
+            <a:ext cx="4294800" cy="435600"/>
           </a:xfrm>
           <a:prstGeom prst="rect">
             <a:avLst/>
@@ -3073,8 +3053,8 @@
         </p:nvSpPr>
         <p:spPr>
           <a:xfrm>
-            <a:off x="504000" y="1044000"/>
-            <a:ext cx="3960000" cy="180000"/>
+            <a:off x="504000" y="1062000"/>
+            <a:ext cx="4320000" cy="180000"/>
           </a:xfrm>
           <a:prstGeom prst="rect">
             <a:avLst/>
@@ -4448,27 +4428,7 @@
                 <a:ea typeface="Space Mono" pitchFamily="34" charset="-122"/>
                 <a:cs typeface="Space Mono" pitchFamily="34" charset="-120"/>
               </a:rPr>
-              <a:t>[STREET ADDRESS]</a:t>
-            </a:r>
-            <a:endParaRPr lang="en-US" sz="710" dirty="0"/>
-          </a:p>
-          <a:p>
-            <a:pPr indent="0" marL="0">
-              <a:lnSpc>
-                <a:spcPct val="155000"/>
-              </a:lnSpc>
-              <a:buNone/>
-            </a:pPr>
-            <a:r>
-              <a:rPr lang="en-US" sz="710" spc="70" kern="0" dirty="0">
-                <a:solidFill>
-                  <a:srgbClr val="868481"/>
-                </a:solidFill>
-                <a:latin typeface="Space Mono" pitchFamily="34" charset="0"/>
-                <a:ea typeface="Space Mono" pitchFamily="34" charset="-122"/>
-                <a:cs typeface="Space Mono" pitchFamily="34" charset="-120"/>
-              </a:rPr>
-              <a:t>SYDNEY NSW [POSTCODE] AUSTRALIA</a:t>
+              <a:t>SYDNEY NSW AUSTRALIA</a:t>
             </a:r>
             <a:endParaRPr lang="en-US" sz="710" dirty="0"/>
           </a:p>
